--- a/docs/ProcPulse-Interview-Deck.pptx
+++ b/docs/ProcPulse-Interview-Deck.pptx
@@ -346,7 +346,7 @@
                   <a:srgbClr val="E2E8F0"/>
                 </a:solidFill>
               </a:rPr>
-              <a:t>Presented by Rudra Prakash Nayak</a:t>
+              <a:t>Presented by Abhipsa Dash</a:t>
             </a:r>
           </a:p>
         </p:txBody>
@@ -602,7 +602,7 @@
                   <a:srgbClr val="64748B"/>
                 </a:solidFill>
               </a:rPr>
-              <a:t>github.com/rudraprakashnayak/procpulse</a:t>
+              <a:t>github.com/muskan-boop/procpulse</a:t>
             </a:r>
           </a:p>
         </p:txBody>
@@ -1329,7 +1329,7 @@
                 <a:latin typeface="Consolas"/>
                 <a:ea typeface="Consolas"/>
               </a:rPr>
-              <a:t>github.com/rudraprakashnayak/procpulse</a:t>
+              <a:t>github.com/muskan-boop/procpulse</a:t>
             </a:r>
           </a:p>
         </p:txBody>
